--- a/site/public/slides/ttl-day3-did-it-land.pptx
+++ b/site/public/slides/ttl-day3-did-it-land.pptx
@@ -2180,7 +2180,7 @@
           <a:p>
             <a:fld id="{5BCAD085-E8A6-8845-BD4E-CB4CCA059FC4}" type="datetimeFigureOut">
               <a:rPr lang="en-US" smtClean="0"/>
-              <a:t>10/2/26</a:t>
+              <a:t>10/6/26</a:t>
             </a:fld>
             <a:endParaRPr lang="en-US"/>
           </a:p>
@@ -2348,7 +2348,7 @@
           <a:p>
             <a:fld id="{5BCAD085-E8A6-8845-BD4E-CB4CCA059FC4}" type="datetimeFigureOut">
               <a:rPr lang="en-US" smtClean="0"/>
-              <a:t>10/2/26</a:t>
+              <a:t>10/6/26</a:t>
             </a:fld>
             <a:endParaRPr lang="en-US"/>
           </a:p>
@@ -2526,7 +2526,7 @@
           <a:p>
             <a:fld id="{5BCAD085-E8A6-8845-BD4E-CB4CCA059FC4}" type="datetimeFigureOut">
               <a:rPr lang="en-US" smtClean="0"/>
-              <a:t>10/2/26</a:t>
+              <a:t>10/6/26</a:t>
             </a:fld>
             <a:endParaRPr lang="en-US"/>
           </a:p>
@@ -2694,7 +2694,7 @@
           <a:p>
             <a:fld id="{5BCAD085-E8A6-8845-BD4E-CB4CCA059FC4}" type="datetimeFigureOut">
               <a:rPr lang="en-US" smtClean="0"/>
-              <a:t>10/2/26</a:t>
+              <a:t>10/6/26</a:t>
             </a:fld>
             <a:endParaRPr lang="en-US"/>
           </a:p>
@@ -2939,7 +2939,7 @@
           <a:p>
             <a:fld id="{5BCAD085-E8A6-8845-BD4E-CB4CCA059FC4}" type="datetimeFigureOut">
               <a:rPr lang="en-US" smtClean="0"/>
-              <a:t>10/2/26</a:t>
+              <a:t>10/6/26</a:t>
             </a:fld>
             <a:endParaRPr lang="en-US"/>
           </a:p>
@@ -3224,7 +3224,7 @@
           <a:p>
             <a:fld id="{5BCAD085-E8A6-8845-BD4E-CB4CCA059FC4}" type="datetimeFigureOut">
               <a:rPr lang="en-US" smtClean="0"/>
-              <a:t>10/2/26</a:t>
+              <a:t>10/6/26</a:t>
             </a:fld>
             <a:endParaRPr lang="en-US"/>
           </a:p>
@@ -3643,7 +3643,7 @@
           <a:p>
             <a:fld id="{5BCAD085-E8A6-8845-BD4E-CB4CCA059FC4}" type="datetimeFigureOut">
               <a:rPr lang="en-US" smtClean="0"/>
-              <a:t>10/2/26</a:t>
+              <a:t>10/6/26</a:t>
             </a:fld>
             <a:endParaRPr lang="en-US"/>
           </a:p>
@@ -3760,7 +3760,7 @@
           <a:p>
             <a:fld id="{5BCAD085-E8A6-8845-BD4E-CB4CCA059FC4}" type="datetimeFigureOut">
               <a:rPr lang="en-US" smtClean="0"/>
-              <a:t>10/2/26</a:t>
+              <a:t>10/6/26</a:t>
             </a:fld>
             <a:endParaRPr lang="en-US"/>
           </a:p>
@@ -3855,7 +3855,7 @@
           <a:p>
             <a:fld id="{5BCAD085-E8A6-8845-BD4E-CB4CCA059FC4}" type="datetimeFigureOut">
               <a:rPr lang="en-US" smtClean="0"/>
-              <a:t>10/2/26</a:t>
+              <a:t>10/6/26</a:t>
             </a:fld>
             <a:endParaRPr lang="en-US"/>
           </a:p>
@@ -4130,7 +4130,7 @@
           <a:p>
             <a:fld id="{5BCAD085-E8A6-8845-BD4E-CB4CCA059FC4}" type="datetimeFigureOut">
               <a:rPr lang="en-US" smtClean="0"/>
-              <a:t>10/2/26</a:t>
+              <a:t>10/6/26</a:t>
             </a:fld>
             <a:endParaRPr lang="en-US"/>
           </a:p>
@@ -4382,7 +4382,7 @@
           <a:p>
             <a:fld id="{5BCAD085-E8A6-8845-BD4E-CB4CCA059FC4}" type="datetimeFigureOut">
               <a:rPr lang="en-US" smtClean="0"/>
-              <a:t>10/2/26</a:t>
+              <a:t>10/6/26</a:t>
             </a:fld>
             <a:endParaRPr lang="en-US"/>
           </a:p>
@@ -4593,7 +4593,7 @@
           <a:p>
             <a:fld id="{5BCAD085-E8A6-8845-BD4E-CB4CCA059FC4}" type="datetimeFigureOut">
               <a:rPr lang="en-US" smtClean="0"/>
-              <a:t>10/2/26</a:t>
+              <a:t>10/6/26</a:t>
             </a:fld>
             <a:endParaRPr lang="en-US"/>
           </a:p>
@@ -5143,13 +5143,7 @@
                   <a:srgbClr val="B24200"/>
                 </a:solidFill>
                 <a:latin typeface="Aptos"/>
-                <a:hlinkClick r:id="rId4">
-                  <a:extLst>
-                    <a:ext uri="{A12FA001-AC4F-418D-AE19-62706E023703}">
-                      <ahyp:hlinkClr xmlns:ahyp="http://schemas.microsoft.com/office/drawing/2018/hyperlinkcolor" val="tx"/>
-                    </a:ext>
-                  </a:extLst>
-                </a:hlinkClick>
+                <a:hlinkClick r:id="rId4"/>
               </a:rPr>
               <a:t>https://teachingthatlands.uk/</a:t>
             </a:r>
@@ -9379,10 +9373,10 @@
       </p:sp>
       <p:pic>
         <p:nvPicPr>
-          <p:cNvPr id="7" name="Graphic 6">
+          <p:cNvPr id="2" name="Graphic 1">
             <a:extLst>
               <a:ext uri="{FF2B5EF4-FFF2-40B4-BE49-F238E27FC236}">
-                <a16:creationId xmlns:a16="http://schemas.microsoft.com/office/drawing/2014/main" id="{00FAF3DA-C001-AEED-1AE9-013A643EC345}"/>
+                <a16:creationId xmlns:a16="http://schemas.microsoft.com/office/drawing/2014/main" id="{C18F1B5F-657B-C05A-5A7F-5FD9CB0652D7}"/>
               </a:ext>
             </a:extLst>
           </p:cNvPr>
@@ -9405,7 +9399,7 @@
         </p:blipFill>
         <p:spPr>
           <a:xfrm>
-            <a:off x="3393936" y="1031333"/>
+            <a:off x="3418403" y="1031333"/>
             <a:ext cx="1969737" cy="1969737"/>
           </a:xfrm>
           <a:prstGeom prst="rect">
@@ -11005,15 +10999,6 @@
                 <a:latin typeface="Georgia"/>
               </a:rPr>
               <a:t>know it landed?</a:t>
-            </a:r>
-            <a:r>
-              <a:rPr sz="5400" b="1" dirty="0">
-                <a:solidFill>
-                  <a:srgbClr val="4C4F69"/>
-                </a:solidFill>
-                <a:latin typeface="Georgia"/>
-              </a:rPr>
-              <a:t/>
             </a:r>
           </a:p>
         </p:txBody>

--- a/site/public/slides/ttl-day3-did-it-land.pptx
+++ b/site/public/slides/ttl-day3-did-it-land.pptx
@@ -1477,7 +1477,7 @@
           </a:p>
           <a:p>
             <a:r>
-              <a:t>  Expected: the self-testers hold up better over a week (Roediger &amp; Karpicke 2006). Whatever the result:</a:t>
+              <a:t>  Take a few answers, or a show of hands for any of the eight words. No score: the room makes the point.</a:t>
             </a:r>
           </a:p>
           <a:p>
@@ -1492,12 +1492,7 @@
           </a:p>
           <a:p>
             <a:r>
-              <a:t>  Unannounced. Hand out the retest slips. Score 1 per meaning roughly right.</a:t>
-            </a:r>
-          </a:p>
-          <a:p>
-            <a:r>
-              <a:t>  Tally Group A (re-read) vs Group B (self-test) NEXT TO LAST WEEK'S NUMBERS.</a:t>
+              <a:t>  Unannounced. Ask out loud: 'Who remembers what a blorp is?' No slips.</a:t>
             </a:r>
           </a:p>
         </p:txBody>
@@ -10566,7 +10561,7 @@
                 </a:solidFill>
                 <a:latin typeface="Georgia"/>
               </a:rPr>
-              <a:t>Quick: what's a </a:t>
+              <a:t>Who remembers what a </a:t>
             </a:r>
             <a:r>
               <a:rPr sz="5400" b="1" i="1" dirty="0" err="1">
@@ -10584,7 +10579,7 @@
                 </a:solidFill>
                 <a:latin typeface="Georgia"/>
               </a:rPr>
-              <a:t>?</a:t>
+              <a:t> is?</a:t>
             </a:r>
           </a:p>
         </p:txBody>
@@ -10619,7 +10614,7 @@
                 </a:solidFill>
                 <a:latin typeface="Aptos"/>
               </a:rPr>
-              <a:t>Same as last week. 2 minutes.</a:t>
+              <a:t>Say it out loud.</a:t>
             </a:r>
           </a:p>
         </p:txBody>

--- a/site/public/slides/ttl-day3-did-it-land.pptx
+++ b/site/public/slides/ttl-day3-did-it-land.pptx
@@ -433,7 +433,7 @@
           </a:p>
           <a:p>
             <a:r>
-              <a:t>  Hand out the design canvas (A4) now if you haven't. Go round: this is the core skill.</a:t>
+              <a:t>  Everyone has their Redesign Worksheet from the first session; spares for anyone without. Go round: this is the core skill.</a:t>
             </a:r>
           </a:p>
           <a:p>
@@ -1070,7 +1070,7 @@
           <a:p>
             <a:r>
               <a:rPr dirty="0"/>
-              <a:t>  Hand out a clean design canvas. This replaces an ask card. It's also portfolio evidence (E3) → /facilitator/portfolio-mapping</a:t>
+              <a:t>  No new sheet: they finish the worksheet they have had since the first session. This replaces an ask card. It's also portfolio evidence (E3) → /facilitator/portfolio-mapping</a:t>
             </a:r>
           </a:p>
         </p:txBody>
@@ -5506,7 +5506,7 @@
                 </a:solidFill>
                 <a:latin typeface="Aptos"/>
               </a:rPr>
-              <a:t>  pairs · on your canvas: Outcomes and Evidence</a:t>
+              <a:t>  pairs · on your worksheet: section 5</a:t>
             </a:r>
           </a:p>
         </p:txBody>
@@ -6680,7 +6680,7 @@
                 </a:solidFill>
                 <a:latin typeface="Aptos"/>
               </a:rPr>
-              <a:t>write their name in the Follow-through box</a:t>
+              <a:t>write their name in section 6</a:t>
             </a:r>
           </a:p>
         </p:txBody>
@@ -7236,7 +7236,7 @@
                 </a:solidFill>
                 <a:latin typeface="Aptos"/>
               </a:rPr>
-              <a:t>  write their name in the Follow-through box</a:t>
+              <a:t>  write their name in section 6</a:t>
             </a:r>
           </a:p>
         </p:txBody>
@@ -7807,7 +7807,7 @@
                 </a:solidFill>
                 <a:latin typeface="Aptos"/>
               </a:rPr>
-              <a:t>Your slides </a:t>
+              <a:t>Your slides and creations, your completed worksheet</a:t>
             </a:r>
             <a:r>
               <a:rPr lang="en-GB" sz="2200" b="0" dirty="0">
@@ -7816,7 +7816,7 @@
                 </a:solidFill>
                 <a:latin typeface="Aptos"/>
               </a:rPr>
-              <a:t>and creations,</a:t>
+              <a:t/>
             </a:r>
             <a:r>
               <a:rPr sz="2200" b="0" dirty="0">
@@ -7825,7 +7825,7 @@
                 </a:solidFill>
                 <a:latin typeface="Aptos"/>
               </a:rPr>
-              <a:t> your </a:t>
+              <a:t/>
             </a:r>
             <a:r>
               <a:rPr lang="en-GB" sz="2200" b="0" dirty="0">
@@ -7834,7 +7834,7 @@
                 </a:solidFill>
                 <a:latin typeface="Aptos"/>
               </a:rPr>
-              <a:t>completed </a:t>
+              <a:t/>
             </a:r>
             <a:r>
               <a:rPr sz="2200" b="0" dirty="0">
@@ -7843,7 +7843,7 @@
                 </a:solidFill>
                 <a:latin typeface="Aptos"/>
               </a:rPr>
-              <a:t>canvas</a:t>
+              <a:t/>
             </a:r>
           </a:p>
         </p:txBody>
@@ -8745,7 +8745,7 @@
                 </a:solidFill>
                 <a:latin typeface="Georgia"/>
               </a:rPr>
-              <a:t>Copy your canvas onto one clean page.</a:t>
+              <a:t>Finish your worksheet, and photograph it.</a:t>
             </a:r>
           </a:p>
           <a:p>
